--- a/presentations/Day 5 - From ML to AI-Enabled Workflows/02_ai_across_full_ml_pipeline.pptx
+++ b/presentations/Day 5 - From ML to AI-Enabled Workflows/02_ai_across_full_ml_pipeline.pptx
@@ -9796,14 +9796,14 @@
               <a:buNone/>
             </a:pPr>
             <a:r>
-              <a:rPr lang="en-US" sz="920" b="1" dirty="0">
+              <a:rPr lang="en-US" sz="1100" b="1" dirty="0">
                 <a:solidFill>
                   <a:srgbClr val="17212B"/>
                 </a:solidFill>
               </a:rPr>
               <a:t>Research question</a:t>
             </a:r>
-            <a:endParaRPr lang="en-US" sz="920" dirty="0"/>
+            <a:endParaRPr lang="en-US" sz="1100" dirty="0"/>
           </a:p>
         </p:txBody>
       </p:sp>
@@ -9834,14 +9834,14 @@
               <a:buNone/>
             </a:pPr>
             <a:r>
-              <a:rPr lang="en-US" sz="740" dirty="0">
+              <a:rPr lang="en-US" sz="1200" dirty="0">
                 <a:solidFill>
                   <a:srgbClr val="6C747C"/>
                 </a:solidFill>
               </a:rPr>
               <a:t>AI-assisted framing</a:t>
             </a:r>
-            <a:endParaRPr lang="en-US" sz="740" dirty="0"/>
+            <a:endParaRPr lang="en-US" sz="1200" dirty="0"/>
           </a:p>
         </p:txBody>
       </p:sp>
@@ -9906,7 +9906,7 @@
           <a:bodyPr/>
           <a:lstStyle/>
           <a:p>
-            <a:endParaRPr lang="en-US"/>
+            <a:endParaRPr lang="en-US" dirty="0"/>
           </a:p>
         </p:txBody>
       </p:sp>
@@ -9935,14 +9935,14 @@
               <a:buNone/>
             </a:pPr>
             <a:r>
-              <a:rPr lang="en-US" sz="920" b="1" dirty="0">
+              <a:rPr lang="en-US" sz="1200" b="1" dirty="0">
                 <a:solidFill>
                   <a:srgbClr val="17212B"/>
                 </a:solidFill>
               </a:rPr>
               <a:t>Data audit</a:t>
             </a:r>
-            <a:endParaRPr lang="en-US" sz="920" dirty="0"/>
+            <a:endParaRPr lang="en-US" sz="1200" dirty="0"/>
           </a:p>
         </p:txBody>
       </p:sp>
@@ -9973,14 +9973,14 @@
               <a:buNone/>
             </a:pPr>
             <a:r>
-              <a:rPr lang="en-US" sz="740" dirty="0">
+              <a:rPr lang="en-US" sz="1200" dirty="0">
                 <a:solidFill>
                   <a:srgbClr val="6C747C"/>
                 </a:solidFill>
               </a:rPr>
               <a:t>AI-assisted review</a:t>
             </a:r>
-            <a:endParaRPr lang="en-US" sz="740" dirty="0"/>
+            <a:endParaRPr lang="en-US" sz="1200" dirty="0"/>
           </a:p>
         </p:txBody>
       </p:sp>
@@ -10074,14 +10074,14 @@
               <a:buNone/>
             </a:pPr>
             <a:r>
-              <a:rPr lang="en-US" sz="920" b="1" dirty="0">
+              <a:rPr lang="en-US" sz="1200" b="1" dirty="0">
                 <a:solidFill>
                   <a:srgbClr val="17212B"/>
                 </a:solidFill>
               </a:rPr>
               <a:t>Preprocessing</a:t>
             </a:r>
-            <a:endParaRPr lang="en-US" sz="920" dirty="0"/>
+            <a:endParaRPr lang="en-US" sz="1200" dirty="0"/>
           </a:p>
         </p:txBody>
       </p:sp>
@@ -10104,7 +10104,7 @@
         </p:spPr>
         <p:txBody>
           <a:bodyPr wrap="square" lIns="0" tIns="0" rIns="0" bIns="0" rtlCol="0" anchor="ctr">
-            <a:normAutofit/>
+            <a:noAutofit/>
           </a:bodyPr>
           <a:lstStyle/>
           <a:p>
@@ -10112,14 +10112,14 @@
               <a:buNone/>
             </a:pPr>
             <a:r>
-              <a:rPr lang="en-US" sz="740" dirty="0">
+              <a:rPr lang="en-US" sz="1200" dirty="0">
                 <a:solidFill>
                   <a:srgbClr val="6C747C"/>
                 </a:solidFill>
               </a:rPr>
               <a:t>Human-validated decisions</a:t>
             </a:r>
-            <a:endParaRPr lang="en-US" sz="740" dirty="0"/>
+            <a:endParaRPr lang="en-US" sz="1200" dirty="0"/>
           </a:p>
         </p:txBody>
       </p:sp>
@@ -10184,7 +10184,7 @@
           <a:bodyPr/>
           <a:lstStyle/>
           <a:p>
-            <a:endParaRPr lang="en-US"/>
+            <a:endParaRPr lang="en-US" dirty="0"/>
           </a:p>
         </p:txBody>
       </p:sp>
@@ -10213,14 +10213,14 @@
               <a:buNone/>
             </a:pPr>
             <a:r>
-              <a:rPr lang="en-US" sz="920" b="1" dirty="0">
+              <a:rPr lang="en-US" sz="1200" b="1" dirty="0">
                 <a:solidFill>
                   <a:srgbClr val="17212B"/>
                 </a:solidFill>
               </a:rPr>
               <a:t>Modeling</a:t>
             </a:r>
-            <a:endParaRPr lang="en-US" sz="920" dirty="0"/>
+            <a:endParaRPr lang="en-US" sz="1200" dirty="0"/>
           </a:p>
         </p:txBody>
       </p:sp>
@@ -10243,7 +10243,7 @@
         </p:spPr>
         <p:txBody>
           <a:bodyPr wrap="square" lIns="0" tIns="0" rIns="0" bIns="0" rtlCol="0" anchor="ctr">
-            <a:normAutofit/>
+            <a:noAutofit/>
           </a:bodyPr>
           <a:lstStyle/>
           <a:p>
@@ -10251,14 +10251,14 @@
               <a:buNone/>
             </a:pPr>
             <a:r>
-              <a:rPr lang="en-US" sz="740" dirty="0">
+              <a:rPr lang="en-US" sz="1200" dirty="0">
                 <a:solidFill>
                   <a:srgbClr val="6C747C"/>
                 </a:solidFill>
               </a:rPr>
               <a:t>Reproducible pipelines</a:t>
             </a:r>
-            <a:endParaRPr lang="en-US" sz="740" dirty="0"/>
+            <a:endParaRPr lang="en-US" sz="1200" dirty="0"/>
           </a:p>
         </p:txBody>
       </p:sp>
@@ -10352,14 +10352,14 @@
               <a:buNone/>
             </a:pPr>
             <a:r>
-              <a:rPr lang="en-US" sz="920" b="1" dirty="0">
+              <a:rPr lang="en-US" sz="1200" b="1" dirty="0">
                 <a:solidFill>
                   <a:srgbClr val="17212B"/>
                 </a:solidFill>
               </a:rPr>
               <a:t>Evaluation</a:t>
             </a:r>
-            <a:endParaRPr lang="en-US" sz="920" dirty="0"/>
+            <a:endParaRPr lang="en-US" sz="1200" dirty="0"/>
           </a:p>
         </p:txBody>
       </p:sp>
@@ -10382,7 +10382,7 @@
         </p:spPr>
         <p:txBody>
           <a:bodyPr wrap="square" lIns="0" tIns="0" rIns="0" bIns="0" rtlCol="0" anchor="ctr">
-            <a:normAutofit/>
+            <a:noAutofit/>
           </a:bodyPr>
           <a:lstStyle/>
           <a:p>
@@ -10390,14 +10390,14 @@
               <a:buNone/>
             </a:pPr>
             <a:r>
-              <a:rPr lang="en-US" sz="740" dirty="0">
+              <a:rPr lang="en-US" sz="1200" dirty="0">
                 <a:solidFill>
                   <a:srgbClr val="6C747C"/>
                 </a:solidFill>
               </a:rPr>
               <a:t>Metric-aware interpretation</a:t>
             </a:r>
-            <a:endParaRPr lang="en-US" sz="740" dirty="0"/>
+            <a:endParaRPr lang="en-US" sz="1200" dirty="0"/>
           </a:p>
         </p:txBody>
       </p:sp>
@@ -10491,14 +10491,14 @@
               <a:buNone/>
             </a:pPr>
             <a:r>
-              <a:rPr lang="en-US" sz="920" b="1" dirty="0">
+              <a:rPr lang="en-US" sz="1200" b="1" dirty="0">
                 <a:solidFill>
                   <a:srgbClr val="17212B"/>
                 </a:solidFill>
               </a:rPr>
               <a:t>Communication</a:t>
             </a:r>
-            <a:endParaRPr lang="en-US" sz="920" dirty="0"/>
+            <a:endParaRPr lang="en-US" sz="1200" dirty="0"/>
           </a:p>
         </p:txBody>
       </p:sp>
@@ -10521,7 +10521,7 @@
         </p:spPr>
         <p:txBody>
           <a:bodyPr wrap="square" lIns="0" tIns="0" rIns="0" bIns="0" rtlCol="0" anchor="ctr">
-            <a:normAutofit/>
+            <a:noAutofit/>
           </a:bodyPr>
           <a:lstStyle/>
           <a:p>
@@ -10529,14 +10529,14 @@
               <a:buNone/>
             </a:pPr>
             <a:r>
-              <a:rPr lang="en-US" sz="740" dirty="0">
+              <a:rPr lang="en-US" sz="1200" dirty="0">
                 <a:solidFill>
                   <a:srgbClr val="6C747C"/>
                 </a:solidFill>
               </a:rPr>
               <a:t>Audience-specific explanations</a:t>
             </a:r>
-            <a:endParaRPr lang="en-US" sz="740" dirty="0"/>
+            <a:endParaRPr lang="en-US" sz="1200" dirty="0"/>
           </a:p>
         </p:txBody>
       </p:sp>
